--- a/docs/AcciSense.pptx
+++ b/docs/AcciSense.pptx
@@ -4313,6 +4313,10 @@
           </a:solidFill>
           <a:ln/>
         </p:spPr>
+        <p:txBody>
+          <a:bodyPr/>
+          <a:p/>
+        </p:txBody>
       </p:sp>
       <p:pic>
         <p:nvPicPr>
@@ -4460,6 +4464,10 @@
           </a:solidFill>
           <a:ln/>
         </p:spPr>
+        <p:txBody>
+          <a:bodyPr/>
+          <a:p/>
+        </p:txBody>
       </p:sp>
       <p:pic>
         <p:nvPicPr>
@@ -4607,6 +4615,10 @@
           </a:solidFill>
           <a:ln/>
         </p:spPr>
+        <p:txBody>
+          <a:bodyPr/>
+          <a:p/>
+        </p:txBody>
       </p:sp>
       <p:pic>
         <p:nvPicPr>
@@ -4754,6 +4766,10 @@
           </a:solidFill>
           <a:ln/>
         </p:spPr>
+        <p:txBody>
+          <a:bodyPr/>
+          <a:p/>
+        </p:txBody>
       </p:sp>
       <p:pic>
         <p:nvPicPr>
@@ -4901,6 +4917,10 @@
           </a:solidFill>
           <a:ln/>
         </p:spPr>
+        <p:txBody>
+          <a:bodyPr/>
+          <a:p/>
+        </p:txBody>
       </p:sp>
       <p:pic>
         <p:nvPicPr>
@@ -5055,6 +5075,10 @@
             </a:outerShdw>
           </a:effectLst>
         </p:spPr>
+        <p:txBody>
+          <a:bodyPr/>
+          <a:p/>
+        </p:txBody>
       </p:sp>
       <p:sp>
         <p:nvSpPr>
@@ -5075,6 +5099,10 @@
           </a:solidFill>
           <a:ln/>
         </p:spPr>
+        <p:txBody>
+          <a:bodyPr/>
+          <a:p/>
+        </p:txBody>
       </p:sp>
       <p:pic>
         <p:nvPicPr>
@@ -5212,6 +5240,10 @@
             </a:outerShdw>
           </a:effectLst>
         </p:spPr>
+        <p:txBody>
+          <a:bodyPr/>
+          <a:p/>
+        </p:txBody>
       </p:sp>
       <p:sp>
         <p:nvSpPr>
@@ -5232,6 +5264,10 @@
           </a:solidFill>
           <a:ln/>
         </p:spPr>
+        <p:txBody>
+          <a:bodyPr/>
+          <a:p/>
+        </p:txBody>
       </p:sp>
       <p:pic>
         <p:nvPicPr>
@@ -5416,6 +5452,37 @@
               <a:t>4</a:t>
             </a:r>
             <a:endParaRPr lang="en-US" sz="1100" dirty="0"/>
+          </a:p>
+        </p:txBody>
+      </p:sp>
+      <p:sp>
+        <p:nvSpPr>
+          <p:cNvPr id="37" name="TextBox 36"/>
+          <p:cNvSpPr txBox="1"/>
+          <p:nvPr/>
+        </p:nvSpPr>
+        <p:spPr>
+          <a:xfrm>
+            <a:off x="548640" y="6080760"/>
+            <a:ext cx="10881360" cy="320040"/>
+          </a:xfrm>
+          <a:prstGeom prst="rect">
+            <a:avLst/>
+          </a:prstGeom>
+          <a:noFill/>
+        </p:spPr>
+        <p:txBody>
+          <a:bodyPr wrap="none">
+            <a:spAutoFit/>
+          </a:bodyPr>
+          <a:lstStyle/>
+          <a:p>
+            <a:r>
+              <a:rPr sz="900" u="sng">
+                <a:hlinkClick r:id="rId11"/>
+              </a:rPr>
+              <a:t>https://youtu.be/8CXjI1oqYuA?si=LyncG314lvh1BxOJ</a:t>
+            </a:r>
           </a:p>
         </p:txBody>
       </p:sp>
@@ -6860,7 +6927,7 @@
 </p:sld>
 </file>
 
-<file path=ppt/slides/slide9.xml><?xml version="1.0" encoding="utf-8"?>
+<file path=ppt/slides/slide6.xml><?xml version="1.0" encoding="utf-8"?>
 <p:sld xmlns:a="http://schemas.openxmlformats.org/drawingml/2006/main" xmlns:r="http://schemas.openxmlformats.org/officeDocument/2006/relationships" xmlns:p="http://schemas.openxmlformats.org/presentationml/2006/main">
   <p:cSld name="Slide 6">
     <p:bg>
